--- a/cv.pptx
+++ b/cv.pptx
@@ -325,7 +325,7 @@
             <a:fld id="{1D8BD707-D9CF-40AE-B4C6-C98DA3205C09}" type="datetimeFigureOut">
               <a:rPr lang="en-US" smtClean="0"/>
               <a:pPr/>
-              <a:t>11/22/2025</a:t>
+              <a:t>12/22/2025</a:t>
             </a:fld>
             <a:endParaRPr lang="en-US"/>
           </a:p>
@@ -490,7 +490,7 @@
             <a:fld id="{1D8BD707-D9CF-40AE-B4C6-C98DA3205C09}" type="datetimeFigureOut">
               <a:rPr lang="en-US" smtClean="0"/>
               <a:pPr/>
-              <a:t>11/22/2025</a:t>
+              <a:t>12/22/2025</a:t>
             </a:fld>
             <a:endParaRPr lang="en-US"/>
           </a:p>
@@ -665,7 +665,7 @@
             <a:fld id="{1D8BD707-D9CF-40AE-B4C6-C98DA3205C09}" type="datetimeFigureOut">
               <a:rPr lang="en-US" smtClean="0"/>
               <a:pPr/>
-              <a:t>11/22/2025</a:t>
+              <a:t>12/22/2025</a:t>
             </a:fld>
             <a:endParaRPr lang="en-US"/>
           </a:p>
@@ -830,7 +830,7 @@
             <a:fld id="{1D8BD707-D9CF-40AE-B4C6-C98DA3205C09}" type="datetimeFigureOut">
               <a:rPr lang="en-US" smtClean="0"/>
               <a:pPr/>
-              <a:t>11/22/2025</a:t>
+              <a:t>12/22/2025</a:t>
             </a:fld>
             <a:endParaRPr lang="en-US"/>
           </a:p>
@@ -1072,7 +1072,7 @@
             <a:fld id="{1D8BD707-D9CF-40AE-B4C6-C98DA3205C09}" type="datetimeFigureOut">
               <a:rPr lang="en-US" smtClean="0"/>
               <a:pPr/>
-              <a:t>11/22/2025</a:t>
+              <a:t>12/22/2025</a:t>
             </a:fld>
             <a:endParaRPr lang="en-US"/>
           </a:p>
@@ -1354,7 +1354,7 @@
             <a:fld id="{1D8BD707-D9CF-40AE-B4C6-C98DA3205C09}" type="datetimeFigureOut">
               <a:rPr lang="en-US" smtClean="0"/>
               <a:pPr/>
-              <a:t>11/22/2025</a:t>
+              <a:t>12/22/2025</a:t>
             </a:fld>
             <a:endParaRPr lang="en-US"/>
           </a:p>
@@ -1770,7 +1770,7 @@
             <a:fld id="{1D8BD707-D9CF-40AE-B4C6-C98DA3205C09}" type="datetimeFigureOut">
               <a:rPr lang="en-US" smtClean="0"/>
               <a:pPr/>
-              <a:t>11/22/2025</a:t>
+              <a:t>12/22/2025</a:t>
             </a:fld>
             <a:endParaRPr lang="en-US"/>
           </a:p>
@@ -1884,7 +1884,7 @@
             <a:fld id="{1D8BD707-D9CF-40AE-B4C6-C98DA3205C09}" type="datetimeFigureOut">
               <a:rPr lang="en-US" smtClean="0"/>
               <a:pPr/>
-              <a:t>11/22/2025</a:t>
+              <a:t>12/22/2025</a:t>
             </a:fld>
             <a:endParaRPr lang="en-US"/>
           </a:p>
@@ -1976,7 +1976,7 @@
             <a:fld id="{1D8BD707-D9CF-40AE-B4C6-C98DA3205C09}" type="datetimeFigureOut">
               <a:rPr lang="en-US" smtClean="0"/>
               <a:pPr/>
-              <a:t>11/22/2025</a:t>
+              <a:t>12/22/2025</a:t>
             </a:fld>
             <a:endParaRPr lang="en-US"/>
           </a:p>
@@ -2248,7 +2248,7 @@
             <a:fld id="{1D8BD707-D9CF-40AE-B4C6-C98DA3205C09}" type="datetimeFigureOut">
               <a:rPr lang="en-US" smtClean="0"/>
               <a:pPr/>
-              <a:t>11/22/2025</a:t>
+              <a:t>12/22/2025</a:t>
             </a:fld>
             <a:endParaRPr lang="en-US"/>
           </a:p>
@@ -2497,7 +2497,7 @@
             <a:fld id="{1D8BD707-D9CF-40AE-B4C6-C98DA3205C09}" type="datetimeFigureOut">
               <a:rPr lang="en-US" smtClean="0"/>
               <a:pPr/>
-              <a:t>11/22/2025</a:t>
+              <a:t>12/22/2025</a:t>
             </a:fld>
             <a:endParaRPr lang="en-US"/>
           </a:p>
@@ -2705,7 +2705,7 @@
             <a:fld id="{1D8BD707-D9CF-40AE-B4C6-C98DA3205C09}" type="datetimeFigureOut">
               <a:rPr lang="en-US" smtClean="0"/>
               <a:pPr/>
-              <a:t>11/22/2025</a:t>
+              <a:t>12/22/2025</a:t>
             </a:fld>
             <a:endParaRPr lang="en-US"/>
           </a:p>
@@ -4988,7 +4988,7 @@
         <p:spPr>
           <a:xfrm>
             <a:off x="2819390" y="1958366"/>
-            <a:ext cx="4276800" cy="5339923"/>
+            <a:ext cx="4276800" cy="8340745"/>
           </a:xfrm>
           <a:prstGeom prst="rect">
             <a:avLst/>
@@ -5136,6 +5136,108 @@
               </a:rPr>
               <a:t>BANK MANAGEMENT SYSTEM</a:t>
             </a:r>
+            <a:endParaRPr lang="en-US" sz="1200" dirty="0"/>
+          </a:p>
+          <a:p>
+            <a:endParaRPr lang="en-US" sz="1200" dirty="0"/>
+          </a:p>
+          <a:p>
+            <a:r>
+              <a:rPr lang="en-US" sz="1200" b="1" dirty="0"/>
+              <a:t>Study Connect SYSTEM                                                                  </a:t>
+            </a:r>
+            <a:r>
+              <a:rPr lang="en-US" sz="1200" dirty="0"/>
+              <a:t>2025</a:t>
+            </a:r>
+          </a:p>
+          <a:p>
+            <a:r>
+              <a:rPr lang="en-US" sz="900" dirty="0">
+                <a:latin typeface="Canva Sans" panose="020B0604020202020204" charset="0"/>
+              </a:rPr>
+              <a:t>The Study Connect is an application in which there are several feature like white board and file upload to database and this project is practice project for .NET Win form</a:t>
+            </a:r>
+            <a:r>
+              <a:rPr lang="en-US" sz="1200" dirty="0">
+                <a:latin typeface="Canva Sans" panose="020B0604020202020204" charset="0"/>
+              </a:rPr>
+              <a:t>.</a:t>
+            </a:r>
+          </a:p>
+          <a:p>
+            <a:r>
+              <a:rPr lang="en-US" sz="1200" b="1" dirty="0"/>
+              <a:t>LINK :</a:t>
+            </a:r>
+            <a:r>
+              <a:rPr lang="en-US" sz="1200" dirty="0">
+                <a:hlinkClick r:id="rId16"/>
+              </a:rPr>
+              <a:t>Study Connect</a:t>
+            </a:r>
+            <a:endParaRPr lang="en-US" sz="1200" dirty="0"/>
+          </a:p>
+          <a:p>
+            <a:endParaRPr lang="en-US" sz="1200" dirty="0">
+              <a:latin typeface="Canva Sans" panose="020B0604020202020204" charset="0"/>
+            </a:endParaRPr>
+          </a:p>
+          <a:p>
+            <a:r>
+              <a:rPr lang="en-US" sz="1200" b="1" dirty="0"/>
+              <a:t>ANTIVIRUS                                                                                       </a:t>
+            </a:r>
+            <a:r>
+              <a:rPr lang="en-US" sz="1200" dirty="0"/>
+              <a:t>2025</a:t>
+            </a:r>
+          </a:p>
+          <a:p>
+            <a:r>
+              <a:rPr lang="en-US" sz="900" dirty="0">
+                <a:latin typeface="Canva Sans" panose="020B0604020202020204" charset="0"/>
+              </a:rPr>
+              <a:t>The Anti virus is WIN Form application for practicing .NET Framework in windows form. This application is cracking and checking all the viruses  in the specific folder of personal computer.</a:t>
+            </a:r>
+          </a:p>
+          <a:p>
+            <a:r>
+              <a:rPr lang="en-US" sz="900" b="1" dirty="0"/>
+              <a:t>LINK :</a:t>
+            </a:r>
+            <a:r>
+              <a:rPr lang="en-US" sz="900" dirty="0">
+                <a:hlinkClick r:id="rId17"/>
+              </a:rPr>
+              <a:t>ANTIVIRUS</a:t>
+            </a:r>
+            <a:endParaRPr lang="en-US" sz="900" dirty="0"/>
+          </a:p>
+          <a:p>
+            <a:endParaRPr lang="en-US" sz="900" dirty="0">
+              <a:latin typeface="Canva Sans" panose="020B0604020202020204" charset="0"/>
+            </a:endParaRPr>
+          </a:p>
+          <a:p>
+            <a:endParaRPr lang="en-US" sz="900" dirty="0">
+              <a:latin typeface="Canva Sans" panose="020B0604020202020204" charset="0"/>
+            </a:endParaRPr>
+          </a:p>
+          <a:p>
+            <a:endParaRPr lang="en-US" sz="1200" dirty="0"/>
+          </a:p>
+          <a:p>
+            <a:endParaRPr lang="en-US" sz="1200" dirty="0">
+              <a:latin typeface="Canva Sans" panose="020B0604020202020204" charset="0"/>
+            </a:endParaRPr>
+          </a:p>
+          <a:p>
+            <a:endParaRPr lang="en-US" sz="1200" dirty="0">
+              <a:latin typeface="Canva Sans" panose="020B0604020202020204" charset="0"/>
+            </a:endParaRPr>
+          </a:p>
+          <a:p>
             <a:endParaRPr lang="en-US" sz="1200" dirty="0"/>
           </a:p>
           <a:p>
@@ -5260,11 +5362,11 @@
           <p:nvPr/>
         </p:nvPicPr>
         <p:blipFill>
-          <a:blip r:embed="rId16" cstate="print">
+          <a:blip r:embed="rId18" cstate="print">
             <a:extLst>
               <a:ext uri="{BEBA8EAE-BF5A-486C-A8C5-ECC9F3942E4B}">
                 <a14:imgProps xmlns:a14="http://schemas.microsoft.com/office/drawing/2010/main">
-                  <a14:imgLayer r:embed="rId17">
+                  <a14:imgLayer r:embed="rId19">
                     <a14:imgEffect>
                       <a14:backgroundRemoval t="38644" b="64935" l="39560" r="56892"/>
                     </a14:imgEffect>
